--- a/Modelo de Apresentação.pptx
+++ b/Modelo de Apresentação.pptx
@@ -560,7 +560,7 @@
           <a:p>
             <a:fld id="{CDD55C27-F8C6-4481-8569-CAC50CAE9F1F}" type="datetimeFigureOut">
               <a:rPr lang="pt-BR" smtClean="0"/>
-              <a:t>26/02/2025</a:t>
+              <a:t>02/08/2025</a:t>
             </a:fld>
             <a:endParaRPr lang="pt-BR"/>
           </a:p>
@@ -737,31 +737,66 @@
         <p:txBody>
           <a:bodyPr/>
           <a:lstStyle>
-            <a:lvl1pPr>
+            <a:lvl1pPr marL="0" indent="0" algn="just">
+              <a:lnSpc>
+                <a:spcPct val="150000"/>
+              </a:lnSpc>
+              <a:spcBef>
+                <a:spcPts val="0"/>
+              </a:spcBef>
+              <a:buNone/>
               <a:defRPr sz="2000">
                 <a:latin typeface="Times New Roman" panose="02020603050405020304" pitchFamily="18" charset="0"/>
                 <a:cs typeface="Times New Roman" panose="02020603050405020304" pitchFamily="18" charset="0"/>
               </a:defRPr>
             </a:lvl1pPr>
-            <a:lvl2pPr>
+            <a:lvl2pPr marL="457200" indent="0" algn="just">
+              <a:lnSpc>
+                <a:spcPct val="150000"/>
+              </a:lnSpc>
+              <a:spcBef>
+                <a:spcPts val="0"/>
+              </a:spcBef>
+              <a:buNone/>
               <a:defRPr sz="1600">
                 <a:latin typeface="Times New Roman" panose="02020603050405020304" pitchFamily="18" charset="0"/>
                 <a:cs typeface="Times New Roman" panose="02020603050405020304" pitchFamily="18" charset="0"/>
               </a:defRPr>
             </a:lvl2pPr>
-            <a:lvl3pPr>
+            <a:lvl3pPr marL="914400" indent="0" algn="just">
+              <a:lnSpc>
+                <a:spcPct val="150000"/>
+              </a:lnSpc>
+              <a:spcBef>
+                <a:spcPts val="0"/>
+              </a:spcBef>
+              <a:buNone/>
               <a:defRPr sz="1400">
                 <a:latin typeface="Times New Roman" panose="02020603050405020304" pitchFamily="18" charset="0"/>
                 <a:cs typeface="Times New Roman" panose="02020603050405020304" pitchFamily="18" charset="0"/>
               </a:defRPr>
             </a:lvl3pPr>
-            <a:lvl4pPr>
+            <a:lvl4pPr marL="1371600" indent="0" algn="just">
+              <a:lnSpc>
+                <a:spcPct val="150000"/>
+              </a:lnSpc>
+              <a:spcBef>
+                <a:spcPts val="0"/>
+              </a:spcBef>
+              <a:buNone/>
               <a:defRPr sz="1200">
                 <a:latin typeface="Times New Roman" panose="02020603050405020304" pitchFamily="18" charset="0"/>
                 <a:cs typeface="Times New Roman" panose="02020603050405020304" pitchFamily="18" charset="0"/>
               </a:defRPr>
             </a:lvl4pPr>
-            <a:lvl5pPr>
+            <a:lvl5pPr marL="1828800" indent="0" algn="just">
+              <a:lnSpc>
+                <a:spcPct val="150000"/>
+              </a:lnSpc>
+              <a:spcBef>
+                <a:spcPts val="0"/>
+              </a:spcBef>
+              <a:buNone/>
               <a:defRPr sz="1000">
                 <a:latin typeface="Times New Roman" panose="02020603050405020304" pitchFamily="18" charset="0"/>
                 <a:cs typeface="Times New Roman" panose="02020603050405020304" pitchFamily="18" charset="0"/>
@@ -1034,7 +1069,7 @@
           <a:p>
             <a:fld id="{CDD55C27-F8C6-4481-8569-CAC50CAE9F1F}" type="datetimeFigureOut">
               <a:rPr lang="pt-BR" smtClean="0"/>
-              <a:t>26/02/2025</a:t>
+              <a:t>02/08/2025</a:t>
             </a:fld>
             <a:endParaRPr lang="pt-BR"/>
           </a:p>
@@ -1337,7 +1372,7 @@
           <a:p>
             <a:fld id="{CDD55C27-F8C6-4481-8569-CAC50CAE9F1F}" type="datetimeFigureOut">
               <a:rPr lang="pt-BR" smtClean="0"/>
-              <a:t>26/02/2025</a:t>
+              <a:t>02/08/2025</a:t>
             </a:fld>
             <a:endParaRPr lang="pt-BR"/>
           </a:p>
@@ -1788,7 +1823,7 @@
           <a:p>
             <a:fld id="{CDD55C27-F8C6-4481-8569-CAC50CAE9F1F}" type="datetimeFigureOut">
               <a:rPr lang="pt-BR" smtClean="0"/>
-              <a:t>26/02/2025</a:t>
+              <a:t>02/08/2025</a:t>
             </a:fld>
             <a:endParaRPr lang="pt-BR"/>
           </a:p>
@@ -1961,7 +1996,7 @@
           <a:p>
             <a:fld id="{CDD55C27-F8C6-4481-8569-CAC50CAE9F1F}" type="datetimeFigureOut">
               <a:rPr lang="pt-BR" smtClean="0"/>
-              <a:t>26/02/2025</a:t>
+              <a:t>02/08/2025</a:t>
             </a:fld>
             <a:endParaRPr lang="pt-BR"/>
           </a:p>
@@ -2098,7 +2133,7 @@
           <a:p>
             <a:fld id="{CDD55C27-F8C6-4481-8569-CAC50CAE9F1F}" type="datetimeFigureOut">
               <a:rPr lang="pt-BR" smtClean="0"/>
-              <a:t>26/02/2025</a:t>
+              <a:t>02/08/2025</a:t>
             </a:fld>
             <a:endParaRPr lang="pt-BR"/>
           </a:p>
@@ -2442,7 +2477,7 @@
           <a:p>
             <a:fld id="{CDD55C27-F8C6-4481-8569-CAC50CAE9F1F}" type="datetimeFigureOut">
               <a:rPr lang="pt-BR" smtClean="0"/>
-              <a:t>26/02/2025</a:t>
+              <a:t>02/08/2025</a:t>
             </a:fld>
             <a:endParaRPr lang="pt-BR"/>
           </a:p>
@@ -2763,7 +2798,7 @@
           <a:p>
             <a:fld id="{CDD55C27-F8C6-4481-8569-CAC50CAE9F1F}" type="datetimeFigureOut">
               <a:rPr lang="pt-BR" smtClean="0"/>
-              <a:t>26/02/2025</a:t>
+              <a:t>02/08/2025</a:t>
             </a:fld>
             <a:endParaRPr lang="pt-BR"/>
           </a:p>
@@ -3322,10 +3357,7 @@
           <a:bodyPr/>
           <a:lstStyle/>
           <a:p>
-            <a:r>
-              <a:rPr lang="pt-BR"/>
-              <a:t>AA</a:t>
-            </a:r>
+            <a:endParaRPr lang="pt-BR" dirty="0"/>
           </a:p>
         </p:txBody>
       </p:sp>
